--- a/system-design-101/vi/lessons/sd-01-025/slides/sd-01-025.pptx
+++ b/system-design-101/vi/lessons/sd-01-025/slides/sd-01-025.pptx
@@ -4543,6 +4543,39 @@
               <a:buNone/>
             </a:pPr>
             <a:r>
+              <a:rPr lang="en-US" sz="2700" dirty="0" spc="0" kern="0">
+                <a:solidFill>
+                  <a:srgbClr val="3B3A37"/>
+                </a:solidFill>
+                <a:latin typeface="Be Vietnam Pro" pitchFamily="34" charset="0"/>
+                <a:ea typeface="Be Vietnam Pro" pitchFamily="34" charset="-122"/>
+                <a:cs typeface="Be Vietnam Pro" pitchFamily="34" charset="-120"/>
+              </a:rPr>
+              <a:t>Minh</a:t>
+            </a:r>
+            <a:r>
+              <a:rPr lang="en-US" sz="2700" dirty="0" spc="-4" kern="0">
+                <a:solidFill>
+                  <a:srgbClr val="3B3A37"/>
+                </a:solidFill>
+                <a:latin typeface="Be Vietnam Pro" pitchFamily="34" charset="0"/>
+                <a:ea typeface="Be Vietnam Pro" pitchFamily="34" charset="-122"/>
+                <a:cs typeface="Be Vietnam Pro" pitchFamily="34" charset="-120"/>
+              </a:rPr>
+              <a:t> họa;</a:t>
+            </a:r>
+            <a:r>
+              <a:rPr lang="en-US" sz="2700" dirty="0" spc="-2" kern="0">
+                <a:solidFill>
+                  <a:srgbClr val="3B3A37"/>
+                </a:solidFill>
+                <a:latin typeface="Be Vietnam Pro" pitchFamily="34" charset="0"/>
+                <a:ea typeface="Be Vietnam Pro" pitchFamily="34" charset="-122"/>
+                <a:cs typeface="Be Vietnam Pro" pitchFamily="34" charset="-120"/>
+              </a:rPr>
+              <a:t> không</a:t>
+            </a:r>
+            <a:r>
               <a:rPr lang="en-US" sz="2700" dirty="0" spc="-1" kern="0">
                 <a:solidFill>
                   <a:srgbClr val="3B3A37"/>
@@ -4551,10 +4584,10 @@
                 <a:ea typeface="Be Vietnam Pro" pitchFamily="34" charset="-122"/>
                 <a:cs typeface="Be Vietnam Pro" pitchFamily="34" charset="-120"/>
               </a:rPr>
-              <a:t>URL</a:t>
-            </a:r>
-            <a:r>
-              <a:rPr lang="en-US" sz="2700" dirty="0" spc="2" kern="0">
+              <a:t> phải</a:t>
+            </a:r>
+            <a:r>
+              <a:rPr lang="en-US" sz="2700" dirty="0" spc="-2" kern="0">
                 <a:solidFill>
                   <a:srgbClr val="3B3A37"/>
                 </a:solidFill>
@@ -4562,10 +4595,10 @@
                 <a:ea typeface="Be Vietnam Pro" pitchFamily="34" charset="-122"/>
                 <a:cs typeface="Be Vietnam Pro" pitchFamily="34" charset="-120"/>
               </a:rPr>
-              <a:t> HTTPS</a:t>
-            </a:r>
-            <a:r>
-              <a:rPr lang="en-US" sz="2700" dirty="0" spc="-2" kern="0">
+              <a:t> URL</a:t>
+            </a:r>
+            <a:r>
+              <a:rPr lang="en-US" sz="2700" dirty="0" spc="-3" kern="0">
                 <a:solidFill>
                   <a:srgbClr val="3B3A37"/>
                 </a:solidFill>
@@ -4573,7 +4606,18 @@
                 <a:ea typeface="Be Vietnam Pro" pitchFamily="34" charset="-122"/>
                 <a:cs typeface="Be Vietnam Pro" pitchFamily="34" charset="-120"/>
               </a:rPr>
-              <a:t> minh</a:t>
+              <a:t> nào</a:t>
+            </a:r>
+            <a:r>
+              <a:rPr lang="en-US" sz="2700" dirty="0" spc="-1" kern="0">
+                <a:solidFill>
+                  <a:srgbClr val="3B3A37"/>
+                </a:solidFill>
+                <a:latin typeface="Be Vietnam Pro" pitchFamily="34" charset="0"/>
+                <a:ea typeface="Be Vietnam Pro" pitchFamily="34" charset="-122"/>
+                <a:cs typeface="Be Vietnam Pro" pitchFamily="34" charset="-120"/>
+              </a:rPr>
+              <a:t> cũng</a:t>
             </a:r>
             <a:r>
               <a:rPr lang="en-US" sz="2700" dirty="0" spc="-4" kern="0">
@@ -4584,65 +4628,10 @@
                 <a:ea typeface="Be Vietnam Pro" pitchFamily="34" charset="-122"/>
                 <a:cs typeface="Be Vietnam Pro" pitchFamily="34" charset="-120"/>
               </a:rPr>
-              <a:t> họa;</a:t>
-            </a:r>
-            <a:r>
-              <a:rPr lang="en-US" sz="2700" dirty="0" spc="-2" kern="0">
-                <a:solidFill>
-                  <a:srgbClr val="3B3A37"/>
-                </a:solidFill>
-                <a:latin typeface="Be Vietnam Pro" pitchFamily="34" charset="0"/>
-                <a:ea typeface="Be Vietnam Pro" pitchFamily="34" charset="-122"/>
-                <a:cs typeface="Be Vietnam Pro" pitchFamily="34" charset="-120"/>
-              </a:rPr>
-              <a:t> không</a:t>
-            </a:r>
-            <a:r>
-              <a:rPr lang="en-US" sz="2700" dirty="0" spc="-1" kern="0">
-                <a:solidFill>
-                  <a:srgbClr val="3B3A37"/>
-                </a:solidFill>
-                <a:latin typeface="Be Vietnam Pro" pitchFamily="34" charset="0"/>
-                <a:ea typeface="Be Vietnam Pro" pitchFamily="34" charset="-122"/>
-                <a:cs typeface="Be Vietnam Pro" pitchFamily="34" charset="-120"/>
-              </a:rPr>
-              <a:t> phải</a:t>
-            </a:r>
-            <a:r>
-              <a:rPr lang="en-US" sz="2700" dirty="0" spc="-2" kern="0">
-                <a:solidFill>
-                  <a:srgbClr val="3B3A37"/>
-                </a:solidFill>
-                <a:latin typeface="Be Vietnam Pro" pitchFamily="34" charset="0"/>
-                <a:ea typeface="Be Vietnam Pro" pitchFamily="34" charset="-122"/>
-                <a:cs typeface="Be Vietnam Pro" pitchFamily="34" charset="-120"/>
-              </a:rPr>
-              <a:t> URL</a:t>
-            </a:r>
-            <a:r>
-              <a:rPr lang="en-US" sz="2700" dirty="0" spc="-3" kern="0">
-                <a:solidFill>
-                  <a:srgbClr val="3B3A37"/>
-                </a:solidFill>
-                <a:latin typeface="Be Vietnam Pro" pitchFamily="34" charset="0"/>
-                <a:ea typeface="Be Vietnam Pro" pitchFamily="34" charset="-122"/>
-                <a:cs typeface="Be Vietnam Pro" pitchFamily="34" charset="-120"/>
-              </a:rPr>
-              <a:t> nào</a:t>
-            </a:r>
-            <a:r>
-              <a:rPr lang="en-US" sz="2700" dirty="0" spc="-2" kern="0">
-                <a:solidFill>
-                  <a:srgbClr val="3B3A37"/>
-                </a:solidFill>
-                <a:latin typeface="Be Vietnam Pro" pitchFamily="34" charset="0"/>
-                <a:ea typeface="Be Vietnam Pro" pitchFamily="34" charset="-122"/>
-                <a:cs typeface="Be Vietnam Pro" pitchFamily="34" charset="-120"/>
-              </a:rPr>
-              <a:t> cũng đủ</a:t>
-            </a:r>
-            <a:r>
-              <a:rPr lang="en-US" sz="2700" dirty="0" spc="-8" kern="0">
+              <a:t> đủ</a:t>
+            </a:r>
+            <a:r>
+              <a:rPr lang="en-US" sz="2700" dirty="0" spc="-7" kern="0">
                 <a:solidFill>
                   <a:srgbClr val="3B3A37"/>
                 </a:solidFill>
@@ -5341,7 +5330,7 @@
               <a:buNone/>
             </a:pPr>
             <a:r>
-              <a:rPr lang="en-US" sz="2700" dirty="0" spc="2" kern="0">
+              <a:rPr lang="en-US" sz="2700" dirty="0" spc="-2" kern="0">
                 <a:solidFill>
                   <a:srgbClr val="14161C"/>
                 </a:solidFill>
@@ -5349,7 +5338,40 @@
                 <a:ea typeface="Be Vietnam Pro" pitchFamily="34" charset="-122"/>
                 <a:cs typeface="Be Vietnam Pro" pitchFamily="34" charset="-120"/>
               </a:rPr>
-              <a:t>Dấu</a:t>
+              <a:t>“:”</a:t>
+            </a:r>
+            <a:r>
+              <a:rPr lang="en-US" sz="2700" dirty="0" spc="-9" kern="0">
+                <a:solidFill>
+                  <a:srgbClr val="14161C"/>
+                </a:solidFill>
+                <a:latin typeface="Be Vietnam Pro" pitchFamily="34" charset="0"/>
+                <a:ea typeface="Be Vietnam Pro" pitchFamily="34" charset="-122"/>
+                <a:cs typeface="Be Vietnam Pro" pitchFamily="34" charset="-120"/>
+              </a:rPr>
+              <a:t> tách</a:t>
+            </a:r>
+            <a:r>
+              <a:rPr lang="en-US" sz="2700" dirty="0" spc="-5" kern="0">
+                <a:solidFill>
+                  <a:srgbClr val="14161C"/>
+                </a:solidFill>
+                <a:latin typeface="Be Vietnam Pro" pitchFamily="34" charset="0"/>
+                <a:ea typeface="Be Vietnam Pro" pitchFamily="34" charset="-122"/>
+                <a:cs typeface="Be Vietnam Pro" pitchFamily="34" charset="-120"/>
+              </a:rPr>
+              <a:t> host,</a:t>
+            </a:r>
+            <a:r>
+              <a:rPr lang="en-US" sz="2700" dirty="0" spc="-3" kern="0">
+                <a:solidFill>
+                  <a:srgbClr val="14161C"/>
+                </a:solidFill>
+                <a:latin typeface="Be Vietnam Pro" pitchFamily="34" charset="0"/>
+                <a:ea typeface="Be Vietnam Pro" pitchFamily="34" charset="-122"/>
+                <a:cs typeface="Be Vietnam Pro" pitchFamily="34" charset="-120"/>
+              </a:rPr>
+              <a:t> port;</a:t>
             </a:r>
             <a:r>
               <a:rPr lang="en-US" sz="2700" dirty="0" spc="-2" kern="0">
@@ -5360,7 +5382,7 @@
                 <a:ea typeface="Be Vietnam Pro" pitchFamily="34" charset="-122"/>
                 <a:cs typeface="Be Vietnam Pro" pitchFamily="34" charset="-120"/>
               </a:rPr>
-              <a:t> hai</a:t>
+              <a:t> “?” mở</a:t>
             </a:r>
             <a:r>
               <a:rPr lang="en-US" sz="2700" dirty="0" spc="0" kern="0">
@@ -5371,10 +5393,10 @@
                 <a:ea typeface="Be Vietnam Pro" pitchFamily="34" charset="-122"/>
                 <a:cs typeface="Be Vietnam Pro" pitchFamily="34" charset="-120"/>
               </a:rPr>
-              <a:t> chấm</a:t>
-            </a:r>
-            <a:r>
-              <a:rPr lang="en-US" sz="2700" dirty="0" spc="-10" kern="0">
+              <a:t> query; “#”</a:t>
+            </a:r>
+            <a:r>
+              <a:rPr lang="en-US" sz="2700" dirty="0" spc="-3" kern="0">
                 <a:solidFill>
                   <a:srgbClr val="14161C"/>
                 </a:solidFill>
@@ -5382,10 +5404,10 @@
                 <a:ea typeface="Be Vietnam Pro" pitchFamily="34" charset="-122"/>
                 <a:cs typeface="Be Vietnam Pro" pitchFamily="34" charset="-120"/>
               </a:rPr>
-              <a:t> tách</a:t>
-            </a:r>
-            <a:r>
-              <a:rPr lang="en-US" sz="2700" dirty="0" spc="-6" kern="0">
+              <a:t> mở</a:t>
+            </a:r>
+            <a:r>
+              <a:rPr lang="en-US" sz="2700" dirty="0" spc="-18" kern="0">
                 <a:solidFill>
                   <a:srgbClr val="14161C"/>
                 </a:solidFill>
@@ -5393,106 +5415,7 @@
                 <a:ea typeface="Be Vietnam Pro" pitchFamily="34" charset="-122"/>
                 <a:cs typeface="Be Vietnam Pro" pitchFamily="34" charset="-120"/>
               </a:rPr>
-              <a:t> host</a:t>
-            </a:r>
-            <a:r>
-              <a:rPr lang="en-US" sz="2700" dirty="0" spc="-14" kern="0">
-                <a:solidFill>
-                  <a:srgbClr val="14161C"/>
-                </a:solidFill>
-                <a:latin typeface="Be Vietnam Pro" pitchFamily="34" charset="0"/>
-                <a:ea typeface="Be Vietnam Pro" pitchFamily="34" charset="-122"/>
-                <a:cs typeface="Be Vietnam Pro" pitchFamily="34" charset="-120"/>
-              </a:rPr>
-              <a:t> với</a:t>
-            </a:r>
-            <a:r>
-              <a:rPr lang="en-US" sz="2700" dirty="0" spc="-4" kern="0">
-                <a:solidFill>
-                  <a:srgbClr val="14161C"/>
-                </a:solidFill>
-                <a:latin typeface="Be Vietnam Pro" pitchFamily="34" charset="0"/>
-                <a:ea typeface="Be Vietnam Pro" pitchFamily="34" charset="-122"/>
-                <a:cs typeface="Be Vietnam Pro" pitchFamily="34" charset="-120"/>
-              </a:rPr>
-              <a:t> port.</a:t>
-            </a:r>
-            <a:r>
-              <a:rPr lang="en-US" sz="2700" dirty="0" spc="0" kern="0">
-                <a:solidFill>
-                  <a:srgbClr val="14161C"/>
-                </a:solidFill>
-                <a:latin typeface="Be Vietnam Pro" pitchFamily="34" charset="0"/>
-                <a:ea typeface="Be Vietnam Pro" pitchFamily="34" charset="-122"/>
-                <a:cs typeface="Be Vietnam Pro" pitchFamily="34" charset="-120"/>
-              </a:rPr>
-              <a:t> Dấu</a:t>
-            </a:r>
-            <a:r>
-              <a:rPr lang="en-US" sz="2700" dirty="0" spc="-3" kern="0">
-                <a:solidFill>
-                  <a:srgbClr val="14161C"/>
-                </a:solidFill>
-                <a:latin typeface="Be Vietnam Pro" pitchFamily="34" charset="0"/>
-                <a:ea typeface="Be Vietnam Pro" pitchFamily="34" charset="-122"/>
-                <a:cs typeface="Be Vietnam Pro" pitchFamily="34" charset="-120"/>
-              </a:rPr>
-              <a:t> ?</a:t>
-            </a:r>
-            <a:r>
-              <a:rPr lang="en-US" sz="2700" dirty="0" spc="-2" kern="0">
-                <a:solidFill>
-                  <a:srgbClr val="14161C"/>
-                </a:solidFill>
-                <a:latin typeface="Be Vietnam Pro" pitchFamily="34" charset="0"/>
-                <a:ea typeface="Be Vietnam Pro" pitchFamily="34" charset="-122"/>
-                <a:cs typeface="Be Vietnam Pro" pitchFamily="34" charset="-120"/>
-              </a:rPr>
-              <a:t> mở</a:t>
-            </a:r>
-            <a:r>
-              <a:rPr lang="en-US" sz="2700" dirty="0" spc="0" kern="0">
-                <a:solidFill>
-                  <a:srgbClr val="14161C"/>
-                </a:solidFill>
-                <a:latin typeface="Be Vietnam Pro" pitchFamily="34" charset="0"/>
-                <a:ea typeface="Be Vietnam Pro" pitchFamily="34" charset="-122"/>
-                <a:cs typeface="Be Vietnam Pro" pitchFamily="34" charset="-120"/>
-              </a:rPr>
-              <a:t> query,</a:t>
-            </a:r>
-            <a:r>
-              <a:rPr lang="en-US" sz="2700" dirty="0" spc="1" kern="0">
-                <a:solidFill>
-                  <a:srgbClr val="14161C"/>
-                </a:solidFill>
-                <a:latin typeface="Be Vietnam Pro" pitchFamily="34" charset="0"/>
-                <a:ea typeface="Be Vietnam Pro" pitchFamily="34" charset="-122"/>
-                <a:cs typeface="Be Vietnam Pro" pitchFamily="34" charset="-120"/>
-              </a:rPr>
-              <a:t> #</a:t>
-            </a:r>
-            <a:r>
-              <a:rPr lang="en-US" sz="2700" dirty="0" spc="-3" kern="0">
-                <a:solidFill>
-                  <a:srgbClr val="14161C"/>
-                </a:solidFill>
-                <a:latin typeface="Be Vietnam Pro" pitchFamily="34" charset="0"/>
-                <a:ea typeface="Be Vietnam Pro" pitchFamily="34" charset="-122"/>
-                <a:cs typeface="Be Vietnam Pro" pitchFamily="34" charset="-120"/>
-              </a:rPr>
-              <a:t> mở</a:t>
-            </a:r>
-            <a:r>
-              <a:rPr lang="en-US" sz="2700" dirty="0" spc="-17" kern="0">
-                <a:solidFill>
-                  <a:srgbClr val="14161C"/>
-                </a:solidFill>
-                <a:latin typeface="Be Vietnam Pro" pitchFamily="34" charset="0"/>
-                <a:ea typeface="Be Vietnam Pro" pitchFamily="34" charset="-122"/>
-                <a:cs typeface="Be Vietnam Pro" pitchFamily="34" charset="-120"/>
-              </a:rPr>
-              <a:t> fragment.</a:t>
+              <a:t> fragment</a:t>
             </a:r>
             <a:endParaRPr lang="en-US" sz="2700" dirty="0"/>
           </a:p>
@@ -10650,17 +10573,6 @@
                 <a:cs typeface="Be Vietnam Pro" pitchFamily="34" charset="-120"/>
               </a:rPr>
               <a:t> trên</a:t>
-            </a:r>
-            <a:r>
-              <a:rPr lang="en-US" sz="3000" dirty="0" spc="5" kern="0">
-                <a:solidFill>
-                  <a:srgbClr val="F3EEE3"/>
-                </a:solidFill>
-                <a:latin typeface="Be Vietnam Pro" pitchFamily="34" charset="0"/>
-                <a:ea typeface="Be Vietnam Pro" pitchFamily="34" charset="-122"/>
-                <a:cs typeface="Be Vietnam Pro" pitchFamily="34" charset="-120"/>
-              </a:rPr>
-              <a:t> ổ</a:t>
             </a:r>
             <a:r>
               <a:rPr lang="en-US" sz="3000" dirty="0" spc="24" kern="0">

--- a/system-design-101/vi/lessons/sd-01-025/slides/sd-01-025.pptx
+++ b/system-design-101/vi/lessons/sd-01-025/slides/sd-01-025.pptx
@@ -11347,7 +11347,7 @@
         <p:spPr>
           <a:xfrm>
             <a:off x="914400" y="1390650"/>
-            <a:ext cx="16459200" cy="1905000"/>
+            <a:ext cx="16459200" cy="2047875"/>
           </a:xfrm>
           <a:prstGeom prst="rect">
             <a:avLst/>
@@ -11356,17 +11356,17 @@
           <a:ln/>
         </p:spPr>
         <p:txBody>
-          <a:bodyPr wrap="square" lIns="0" tIns="36195" rIns="0" bIns="-36195" rtlCol="0" anchor="t"/>
+          <a:bodyPr wrap="square" lIns="0" tIns="43815" rIns="0" bIns="-43815" rtlCol="0" anchor="t"/>
           <a:lstStyle/>
           <a:p>
             <a:pPr algn="l" indent="0" marL="0">
               <a:lnSpc>
-                <a:spcPts val="6270"/>
+                <a:spcPts val="7590"/>
               </a:lnSpc>
               <a:buNone/>
             </a:pPr>
             <a:r>
-              <a:rPr lang="en-US" sz="5700" dirty="0" spc="3" kern="0">
+              <a:rPr lang="en-US" sz="6900" dirty="0" spc="8" kern="0">
                 <a:solidFill>
                   <a:srgbClr val="14161C"/>
                 </a:solidFill>
@@ -11377,7 +11377,7 @@
               <a:t>Chỉ</a:t>
             </a:r>
             <a:r>
-              <a:rPr lang="en-US" sz="5700" dirty="0" spc="7" kern="0">
+              <a:rPr lang="en-US" sz="6900" dirty="0" spc="13" kern="0">
                 <a:solidFill>
                   <a:srgbClr val="14161C"/>
                 </a:solidFill>
@@ -11388,7 +11388,7 @@
               <a:t> đổi</a:t>
             </a:r>
             <a:r>
-              <a:rPr lang="en-US" sz="5700" dirty="0" spc="-4" kern="0">
+              <a:rPr lang="en-US" sz="6900" dirty="0" spc="-6" kern="0">
                 <a:solidFill>
                   <a:srgbClr val="14161C"/>
                 </a:solidFill>
@@ -11399,7 +11399,7 @@
               <a:t> fragment.</a:t>
             </a:r>
             <a:r>
-              <a:rPr lang="en-US" sz="5700" dirty="0" spc="-15" kern="0">
+              <a:rPr lang="en-US" sz="6900" dirty="0" spc="-18" kern="0">
                 <a:solidFill>
                   <a:srgbClr val="14161C"/>
                 </a:solidFill>
@@ -11410,7 +11410,7 @@
               <a:t> Server</a:t>
             </a:r>
             <a:r>
-              <a:rPr lang="en-US" sz="5700" dirty="0" spc="-4" kern="0">
+              <a:rPr lang="en-US" sz="6900" dirty="0" spc="-2" kern="0">
                 <a:solidFill>
                   <a:srgbClr val="14161C"/>
                 </a:solidFill>
@@ -11421,7 +11421,7 @@
               <a:t> có</a:t>
             </a:r>
             <a:r>
-              <a:rPr lang="en-US" sz="5700" dirty="0" spc="0" kern="0">
+              <a:rPr lang="en-US" sz="6900" dirty="0" spc="1" kern="0">
                 <a:solidFill>
                   <a:srgbClr val="14161C"/>
                 </a:solidFill>
@@ -11432,7 +11432,7 @@
               <a:t> nhận</a:t>
             </a:r>
             <a:r>
-              <a:rPr lang="en-US" sz="5700" dirty="0" spc="-9" kern="0">
+              <a:rPr lang="en-US" sz="6900" dirty="0" spc="-12" kern="0">
                 <a:solidFill>
                   <a:srgbClr val="14161C"/>
                 </a:solidFill>
@@ -11443,7 +11443,7 @@
               <a:t> fragment</a:t>
             </a:r>
             <a:r>
-              <a:rPr lang="en-US" sz="5700" dirty="0" spc="-29" kern="0">
+              <a:rPr lang="en-US" sz="6900" dirty="0" spc="-33" kern="0">
                 <a:solidFill>
                   <a:srgbClr val="14161C"/>
                 </a:solidFill>
@@ -11454,7 +11454,7 @@
               <a:t> mới</a:t>
             </a:r>
             <a:r>
-              <a:rPr lang="en-US" sz="5700" dirty="0" spc="-1" kern="0">
+              <a:rPr lang="en-US" sz="6900" dirty="0" spc="0" kern="0">
                 <a:solidFill>
                   <a:srgbClr val="14161C"/>
                 </a:solidFill>
@@ -11464,7 +11464,7 @@
               </a:rPr>
               <a:t> không?</a:t>
             </a:r>
-            <a:endParaRPr lang="en-US" sz="5700" dirty="0"/>
+            <a:endParaRPr lang="en-US" sz="6900" dirty="0"/>
           </a:p>
         </p:txBody>
       </p:sp>
